--- a/docs/05-pitch/Pramaan_BIOS_Screening_v6.pptx
+++ b/docs/05-pitch/Pramaan_BIOS_Screening_v6.pptx
@@ -5517,7 +5517,7 @@
                 </a:solidFill>
                 <a:latin typeface="Calibri"/>
               </a:rPr>
-              <a:t>fingerprint: </a:t>
+              <a:t>passkey: </a:t>
             </a:r>
             <a:r>
               <a:rPr sz="1050" b="0" i="0">
